--- a/ゲーム科3年/00_前期/ゲームエンジンⅤ/09_衝突処理.pptx
+++ b/ゲーム科3年/00_前期/ゲームエンジンⅤ/09_衝突処理.pptx
@@ -272,7 +272,7 @@
           <a:p>
             <a:fld id="{E9CC885B-4903-4D54-9A93-00025F12DED9}" type="datetimeFigureOut">
               <a:rPr kumimoji="1" lang="ja-JP" altLang="en-US" smtClean="0"/>
-              <a:t>2025/2/5</a:t>
+              <a:t>2025/11/7</a:t>
             </a:fld>
             <a:endParaRPr kumimoji="1" lang="ja-JP" altLang="en-US"/>
           </a:p>
@@ -502,7 +502,7 @@
           <a:p>
             <a:fld id="{E9CC885B-4903-4D54-9A93-00025F12DED9}" type="datetimeFigureOut">
               <a:rPr kumimoji="1" lang="ja-JP" altLang="en-US" smtClean="0"/>
-              <a:t>2025/2/5</a:t>
+              <a:t>2025/11/7</a:t>
             </a:fld>
             <a:endParaRPr kumimoji="1" lang="ja-JP" altLang="en-US"/>
           </a:p>
@@ -742,7 +742,7 @@
           <a:p>
             <a:fld id="{E9CC885B-4903-4D54-9A93-00025F12DED9}" type="datetimeFigureOut">
               <a:rPr kumimoji="1" lang="ja-JP" altLang="en-US" smtClean="0"/>
-              <a:t>2025/2/5</a:t>
+              <a:t>2025/11/7</a:t>
             </a:fld>
             <a:endParaRPr kumimoji="1" lang="ja-JP" altLang="en-US"/>
           </a:p>
@@ -972,7 +972,7 @@
           <a:p>
             <a:fld id="{E9CC885B-4903-4D54-9A93-00025F12DED9}" type="datetimeFigureOut">
               <a:rPr kumimoji="1" lang="ja-JP" altLang="en-US" smtClean="0"/>
-              <a:t>2025/2/5</a:t>
+              <a:t>2025/11/7</a:t>
             </a:fld>
             <a:endParaRPr kumimoji="1" lang="ja-JP" altLang="en-US"/>
           </a:p>
@@ -1247,7 +1247,7 @@
           <a:p>
             <a:fld id="{E9CC885B-4903-4D54-9A93-00025F12DED9}" type="datetimeFigureOut">
               <a:rPr kumimoji="1" lang="ja-JP" altLang="en-US" smtClean="0"/>
-              <a:t>2025/2/5</a:t>
+              <a:t>2025/11/7</a:t>
             </a:fld>
             <a:endParaRPr kumimoji="1" lang="ja-JP" altLang="en-US"/>
           </a:p>
@@ -1576,7 +1576,7 @@
           <a:p>
             <a:fld id="{E9CC885B-4903-4D54-9A93-00025F12DED9}" type="datetimeFigureOut">
               <a:rPr kumimoji="1" lang="ja-JP" altLang="en-US" smtClean="0"/>
-              <a:t>2025/2/5</a:t>
+              <a:t>2025/11/7</a:t>
             </a:fld>
             <a:endParaRPr kumimoji="1" lang="ja-JP" altLang="en-US"/>
           </a:p>
@@ -2052,7 +2052,7 @@
           <a:p>
             <a:fld id="{E9CC885B-4903-4D54-9A93-00025F12DED9}" type="datetimeFigureOut">
               <a:rPr kumimoji="1" lang="ja-JP" altLang="en-US" smtClean="0"/>
-              <a:t>2025/2/5</a:t>
+              <a:t>2025/11/7</a:t>
             </a:fld>
             <a:endParaRPr kumimoji="1" lang="ja-JP" altLang="en-US"/>
           </a:p>
@@ -2193,7 +2193,7 @@
           <a:p>
             <a:fld id="{E9CC885B-4903-4D54-9A93-00025F12DED9}" type="datetimeFigureOut">
               <a:rPr kumimoji="1" lang="ja-JP" altLang="en-US" smtClean="0"/>
-              <a:t>2025/2/5</a:t>
+              <a:t>2025/11/7</a:t>
             </a:fld>
             <a:endParaRPr kumimoji="1" lang="ja-JP" altLang="en-US"/>
           </a:p>
@@ -2306,7 +2306,7 @@
           <a:p>
             <a:fld id="{E9CC885B-4903-4D54-9A93-00025F12DED9}" type="datetimeFigureOut">
               <a:rPr kumimoji="1" lang="ja-JP" altLang="en-US" smtClean="0"/>
-              <a:t>2025/2/5</a:t>
+              <a:t>2025/11/7</a:t>
             </a:fld>
             <a:endParaRPr kumimoji="1" lang="ja-JP" altLang="en-US"/>
           </a:p>
@@ -2649,7 +2649,7 @@
           <a:p>
             <a:fld id="{E9CC885B-4903-4D54-9A93-00025F12DED9}" type="datetimeFigureOut">
               <a:rPr kumimoji="1" lang="ja-JP" altLang="en-US" smtClean="0"/>
-              <a:t>2025/2/5</a:t>
+              <a:t>2025/11/7</a:t>
             </a:fld>
             <a:endParaRPr kumimoji="1" lang="ja-JP" altLang="en-US"/>
           </a:p>
@@ -2937,7 +2937,7 @@
           <a:p>
             <a:fld id="{E9CC885B-4903-4D54-9A93-00025F12DED9}" type="datetimeFigureOut">
               <a:rPr kumimoji="1" lang="ja-JP" altLang="en-US" smtClean="0"/>
-              <a:t>2025/2/5</a:t>
+              <a:t>2025/11/7</a:t>
             </a:fld>
             <a:endParaRPr kumimoji="1" lang="ja-JP" altLang="en-US"/>
           </a:p>
@@ -3210,7 +3210,7 @@
           <a:p>
             <a:fld id="{E9CC885B-4903-4D54-9A93-00025F12DED9}" type="datetimeFigureOut">
               <a:rPr kumimoji="1" lang="ja-JP" altLang="en-US" smtClean="0"/>
-              <a:t>2025/2/5</a:t>
+              <a:t>2025/11/7</a:t>
             </a:fld>
             <a:endParaRPr kumimoji="1" lang="ja-JP" altLang="en-US"/>
           </a:p>
@@ -5978,7 +5978,7 @@
           <a:p>
             <a:r>
               <a:rPr lang="ja-JP" altLang="en-US" sz="2400" dirty="0"/>
-              <a:t>ボタンを押してつかしましょう。</a:t>
+              <a:t>右側の＋ボタンを押してみましょう。</a:t>
             </a:r>
             <a:endParaRPr kumimoji="1" lang="en-US" altLang="ja-JP" sz="2400" dirty="0"/>
           </a:p>

--- a/ゲーム科3年/00_前期/ゲームエンジンⅤ/09_衝突処理.pptx
+++ b/ゲーム科3年/00_前期/ゲームエンジンⅤ/09_衝突処理.pptx
@@ -272,7 +272,7 @@
           <a:p>
             <a:fld id="{E9CC885B-4903-4D54-9A93-00025F12DED9}" type="datetimeFigureOut">
               <a:rPr kumimoji="1" lang="ja-JP" altLang="en-US" smtClean="0"/>
-              <a:t>2025/11/7</a:t>
+              <a:t>2026/3/26</a:t>
             </a:fld>
             <a:endParaRPr kumimoji="1" lang="ja-JP" altLang="en-US"/>
           </a:p>
@@ -502,7 +502,7 @@
           <a:p>
             <a:fld id="{E9CC885B-4903-4D54-9A93-00025F12DED9}" type="datetimeFigureOut">
               <a:rPr kumimoji="1" lang="ja-JP" altLang="en-US" smtClean="0"/>
-              <a:t>2025/11/7</a:t>
+              <a:t>2026/3/26</a:t>
             </a:fld>
             <a:endParaRPr kumimoji="1" lang="ja-JP" altLang="en-US"/>
           </a:p>
@@ -742,7 +742,7 @@
           <a:p>
             <a:fld id="{E9CC885B-4903-4D54-9A93-00025F12DED9}" type="datetimeFigureOut">
               <a:rPr kumimoji="1" lang="ja-JP" altLang="en-US" smtClean="0"/>
-              <a:t>2025/11/7</a:t>
+              <a:t>2026/3/26</a:t>
             </a:fld>
             <a:endParaRPr kumimoji="1" lang="ja-JP" altLang="en-US"/>
           </a:p>
@@ -972,7 +972,7 @@
           <a:p>
             <a:fld id="{E9CC885B-4903-4D54-9A93-00025F12DED9}" type="datetimeFigureOut">
               <a:rPr kumimoji="1" lang="ja-JP" altLang="en-US" smtClean="0"/>
-              <a:t>2025/11/7</a:t>
+              <a:t>2026/3/26</a:t>
             </a:fld>
             <a:endParaRPr kumimoji="1" lang="ja-JP" altLang="en-US"/>
           </a:p>
@@ -1247,7 +1247,7 @@
           <a:p>
             <a:fld id="{E9CC885B-4903-4D54-9A93-00025F12DED9}" type="datetimeFigureOut">
               <a:rPr kumimoji="1" lang="ja-JP" altLang="en-US" smtClean="0"/>
-              <a:t>2025/11/7</a:t>
+              <a:t>2026/3/26</a:t>
             </a:fld>
             <a:endParaRPr kumimoji="1" lang="ja-JP" altLang="en-US"/>
           </a:p>
@@ -1576,7 +1576,7 @@
           <a:p>
             <a:fld id="{E9CC885B-4903-4D54-9A93-00025F12DED9}" type="datetimeFigureOut">
               <a:rPr kumimoji="1" lang="ja-JP" altLang="en-US" smtClean="0"/>
-              <a:t>2025/11/7</a:t>
+              <a:t>2026/3/26</a:t>
             </a:fld>
             <a:endParaRPr kumimoji="1" lang="ja-JP" altLang="en-US"/>
           </a:p>
@@ -2052,7 +2052,7 @@
           <a:p>
             <a:fld id="{E9CC885B-4903-4D54-9A93-00025F12DED9}" type="datetimeFigureOut">
               <a:rPr kumimoji="1" lang="ja-JP" altLang="en-US" smtClean="0"/>
-              <a:t>2025/11/7</a:t>
+              <a:t>2026/3/26</a:t>
             </a:fld>
             <a:endParaRPr kumimoji="1" lang="ja-JP" altLang="en-US"/>
           </a:p>
@@ -2193,7 +2193,7 @@
           <a:p>
             <a:fld id="{E9CC885B-4903-4D54-9A93-00025F12DED9}" type="datetimeFigureOut">
               <a:rPr kumimoji="1" lang="ja-JP" altLang="en-US" smtClean="0"/>
-              <a:t>2025/11/7</a:t>
+              <a:t>2026/3/26</a:t>
             </a:fld>
             <a:endParaRPr kumimoji="1" lang="ja-JP" altLang="en-US"/>
           </a:p>
@@ -2306,7 +2306,7 @@
           <a:p>
             <a:fld id="{E9CC885B-4903-4D54-9A93-00025F12DED9}" type="datetimeFigureOut">
               <a:rPr kumimoji="1" lang="ja-JP" altLang="en-US" smtClean="0"/>
-              <a:t>2025/11/7</a:t>
+              <a:t>2026/3/26</a:t>
             </a:fld>
             <a:endParaRPr kumimoji="1" lang="ja-JP" altLang="en-US"/>
           </a:p>
@@ -2649,7 +2649,7 @@
           <a:p>
             <a:fld id="{E9CC885B-4903-4D54-9A93-00025F12DED9}" type="datetimeFigureOut">
               <a:rPr kumimoji="1" lang="ja-JP" altLang="en-US" smtClean="0"/>
-              <a:t>2025/11/7</a:t>
+              <a:t>2026/3/26</a:t>
             </a:fld>
             <a:endParaRPr kumimoji="1" lang="ja-JP" altLang="en-US"/>
           </a:p>
@@ -2937,7 +2937,7 @@
           <a:p>
             <a:fld id="{E9CC885B-4903-4D54-9A93-00025F12DED9}" type="datetimeFigureOut">
               <a:rPr kumimoji="1" lang="ja-JP" altLang="en-US" smtClean="0"/>
-              <a:t>2025/11/7</a:t>
+              <a:t>2026/3/26</a:t>
             </a:fld>
             <a:endParaRPr kumimoji="1" lang="ja-JP" altLang="en-US"/>
           </a:p>
@@ -3210,7 +3210,7 @@
           <a:p>
             <a:fld id="{E9CC885B-4903-4D54-9A93-00025F12DED9}" type="datetimeFigureOut">
               <a:rPr kumimoji="1" lang="ja-JP" altLang="en-US" smtClean="0"/>
-              <a:t>2025/11/7</a:t>
+              <a:t>2026/3/26</a:t>
             </a:fld>
             <a:endParaRPr kumimoji="1" lang="ja-JP" altLang="en-US"/>
           </a:p>
@@ -4569,6 +4569,72 @@
           </a:prstGeom>
         </p:spPr>
       </p:pic>
+      <p:sp>
+        <p:nvSpPr>
+          <p:cNvPr id="5" name="テキスト ボックス 4">
+            <a:extLst>
+              <a:ext uri="{FF2B5EF4-FFF2-40B4-BE49-F238E27FC236}">
+                <a16:creationId xmlns:a16="http://schemas.microsoft.com/office/drawing/2014/main" id="{677932EA-41F5-435D-98C5-B88AFF447F3C}"/>
+              </a:ext>
+            </a:extLst>
+          </p:cNvPr>
+          <p:cNvSpPr txBox="1"/>
+          <p:nvPr/>
+        </p:nvSpPr>
+        <p:spPr>
+          <a:xfrm>
+            <a:off x="567541" y="3603813"/>
+            <a:ext cx="8291052" cy="1200329"/>
+          </a:xfrm>
+          <a:prstGeom prst="rect">
+            <a:avLst/>
+          </a:prstGeom>
+          <a:noFill/>
+        </p:spPr>
+        <p:txBody>
+          <a:bodyPr wrap="none" rtlCol="0">
+            <a:spAutoFit/>
+          </a:bodyPr>
+          <a:lstStyle/>
+          <a:p>
+            <a:r>
+              <a:rPr kumimoji="1" lang="ja-JP" altLang="en-US" sz="2400" dirty="0"/>
+              <a:t>今回は練習のため衝突処理の入り口を</a:t>
+            </a:r>
+            <a:r>
+              <a:rPr kumimoji="1" lang="en-US" altLang="ja-JP" sz="2400" dirty="0"/>
+              <a:t>BP</a:t>
+            </a:r>
+            <a:r>
+              <a:rPr kumimoji="1" lang="ja-JP" altLang="en-US" sz="2400" dirty="0"/>
+              <a:t>で作りましたが、</a:t>
+            </a:r>
+            <a:endParaRPr kumimoji="1" lang="en-US" altLang="ja-JP" sz="2400" dirty="0"/>
+          </a:p>
+          <a:p>
+            <a:r>
+              <a:rPr lang="ja-JP" altLang="en-US" sz="2400" dirty="0"/>
+              <a:t>実際は全部</a:t>
+            </a:r>
+            <a:r>
+              <a:rPr lang="en-US" altLang="ja-JP" sz="2400" dirty="0"/>
+              <a:t>C</a:t>
+            </a:r>
+            <a:r>
+              <a:rPr lang="ja-JP" altLang="en-US" sz="2400" dirty="0"/>
+              <a:t>＋＋側で実装します。</a:t>
+            </a:r>
+            <a:endParaRPr lang="en-US" altLang="ja-JP" sz="2400" dirty="0"/>
+          </a:p>
+          <a:p>
+            <a:r>
+              <a:rPr kumimoji="1" lang="ja-JP" altLang="en-US" sz="2400" dirty="0"/>
+              <a:t>興味のある方は調べてみましょう。</a:t>
+            </a:r>
+            <a:endParaRPr kumimoji="1" lang="en-US" altLang="ja-JP" sz="2400" dirty="0"/>
+          </a:p>
+        </p:txBody>
+      </p:sp>
     </p:spTree>
     <p:extLst>
       <p:ext uri="{BB962C8B-B14F-4D97-AF65-F5344CB8AC3E}">
@@ -5652,7 +5718,7 @@
         <p:spPr>
           <a:xfrm>
             <a:off x="567542" y="1216429"/>
-            <a:ext cx="10033516" cy="830997"/>
+            <a:ext cx="9417963" cy="830997"/>
           </a:xfrm>
           <a:prstGeom prst="rect">
             <a:avLst/>
@@ -5687,7 +5753,7 @@
                   <a:srgbClr val="FF0000"/>
                 </a:solidFill>
               </a:rPr>
-              <a:t>イベントごとの処理</a:t>
+              <a:t>イベント処理</a:t>
             </a:r>
             <a:r>
               <a:rPr kumimoji="1" lang="ja-JP" altLang="en-US" sz="2400" dirty="0"/>
